--- a/decks/englang-opinion/englang-opinion_ch2_review-features.pptx
+++ b/decks/englang-opinion/englang-opinion_ch2_review-features.pptx
@@ -127,29 +127,29 @@
   <p:extLst>
     <p:ext uri="{521415D9-36F7-43E2-AB2F-B90AF26B5E84}">
       <p14:sectionLst xmlns:p14="http://schemas.microsoft.com/office/powerpoint/2010/main">
-        <p14:section name="Opening" id="{0a9875c4-77bd-c025-c18c-8d9fe7ecd18b}">
+        <p14:section name="Opening" id="{175853b3-e993-d8a3-49ac-8c2303208a08}">
           <p14:sldIdLst>
             <p14:sldId id="256"/>
           </p14:sldIdLst>
         </p14:section>
-        <p14:section name="Gate" id="{4da60632-d067-1632-3cf9-2d44024c0b61}">
+        <p14:section name="Gate" id="{09c9b760-6313-ab81-2351-fa071d8d759b}">
           <p14:sldIdLst>
             <p14:sldId id="257"/>
             <p14:sldId id="258"/>
           </p14:sldIdLst>
         </p14:section>
-        <p14:section name="Pre-teach" id="{6a954da8-012b-9d51-65cc-47a27e9e8e26}">
+        <p14:section name="Pre-teach" id="{8b70bb8e-a4aa-e981-9ff5-5b9e1c49b9c2}">
           <p14:sldIdLst>
             <p14:sldId id="259"/>
           </p14:sldIdLst>
         </p14:section>
-        <p14:section name="Read-along" id="{ed4d8669-ff41-b81d-bbaa-5bfc4891221e}">
+        <p14:section name="Read-along" id="{1d65f187-73a9-031f-6ee1-1dc839e2d6dd}">
           <p14:sldIdLst>
             <p14:sldId id="260"/>
             <p14:sldId id="261"/>
           </p14:sldIdLst>
         </p14:section>
-        <p14:section name="Teach" id="{dca3834b-420d-ae75-92cc-b0a18c5fa69d}">
+        <p14:section name="Teach" id="{29185973-ec6b-6ac5-d6e2-17c14d4930c5}">
           <p14:sldIdLst>
             <p14:sldId id="262"/>
             <p14:sldId id="263"/>
@@ -158,7 +158,7 @@
             <p14:sldId id="266"/>
           </p14:sldIdLst>
         </p14:section>
-        <p14:section name="Routes" id="{16c46f54-ea6f-9c80-0c2b-0a8b6efafc07}">
+        <p14:section name="Routes" id="{b8928293-1587-84d4-d7df-63cffec311a2}">
           <p14:sldIdLst>
             <p14:sldId id="267"/>
             <p14:sldId id="268"/>
@@ -168,12 +168,12 @@
             <p14:sldId id="272"/>
           </p14:sldIdLst>
         </p14:section>
-        <p14:section name="Close" id="{e4e13191-1e87-7536-5a36-3101a76a7165}">
+        <p14:section name="Close" id="{58ea012f-6c24-89ca-3e6e-81eeb373585a}">
           <p14:sldIdLst>
             <p14:sldId id="273"/>
           </p14:sldIdLst>
         </p14:section>
-        <p14:section name="Answers" id="{c0c7a1f4-c82e-01a8-47e3-cd0cc80e6074}">
+        <p14:section name="Answers" id="{2de7e1ff-8a1a-a925-1233-596e6c19cfe5}">
           <p14:sldIdLst>
             <p14:sldId id="274"/>
             <p14:sldId id="275"/>
@@ -1427,7 +1427,7 @@
               <a:rPr lang="en-US" dirty="0"/>
               <a:t>Exit ticket — individual, silent, on a slip or mini-whiteboard. Recall before help: no notes, no lanes, no hints. Collect before pupils leave.
 Question: Who writes a review?
-Answer: D   A critic who has experienced the thing being reviewed. A critic experiences something and then tells readers what it was like and how they formed their opinion.
+Answer: B   A critic who has experienced the thing being reviewed. A critic experiences something and then tells readers what it was like and how they formed their opinion.
 Source of this question: gate item 1 re-asked (options rotated) — this chapter has no third quick-check module.
 The ebook also holds task 3, "Writing practice: an intentionally bad review", for homework or the next lesson's do now.
 Sort the slips: correct → ready to move on; incorrect → start next lesson in the pre-teach group, with the read-along and the Support lane. Same destination next time.</a:t>
@@ -1610,9 +1610,9 @@
             <a:r>
               <a:rPr lang="en-US" dirty="0"/>
               <a:t>Do now — retrieval. Silent, no notes, no help: recall comes before any support. Give about four minutes.
-1. Who writes a review?  →  A   A critic who has experienced the thing being reviewed
+1. Who writes a review?  →  C   A critic who has experienced the thing being reviewed
 2. When a review describes the writer’s experience, it is usually written in the ___ tense.  →  past
-3. Where does a review give its clear final judgement?  →  B   In the last paragraph
+3. Where does a review give its clear final judgement?  →  C   In the last paragraph
 Circulate: who gets 3/3 (Stretch route), 2/3 (Core), 0–1 (Support)? Use this to route pupils later in the lesson.</a:t>
             </a:r>
             <a:endParaRPr lang="en-US" dirty="0"/>
@@ -1702,7 +1702,7 @@
             <a:r>
               <a:rPr lang="en-US" dirty="0"/>
               <a:t>Answers — task 2: Review or speech?. Reveal the answer; pupils mark their own work in a different colour, then read the "why" together. Same destination for every lane, so one answer serves the whole class.
-Answer: A   Cutting the facts and keeping only the writer’s opinions, so a crowd could be urged to attend
+Answer: D   Cutting the facts and keeping only the writer’s opinions, so a crowd could be urged to attend
 Why: A review informs with facts and experience; a speech persuades a live audience with opinion. Remove the facts and you have a speech.
 Ask a Support pupil to explain one step, and a Stretch pupil to share their extension.</a:t>
             </a:r>
@@ -1793,7 +1793,7 @@
             <a:r>
               <a:rPr lang="en-US" dirty="0"/>
               <a:t>Answers — exit ticket: Exit ticket. Reveal the answer; pupils mark their own work in a different colour, then read the "why" together. Same destination for every lane, so one answer serves the whole class.
-Answer: D   A critic who has experienced the thing being reviewed
+Answer: B   A critic who has experienced the thing being reviewed
 Why: A critic experiences something and then tells readers what it was like and how they formed their opinion.
 Ask a Support pupil to explain one step, and a Stretch pupil to share their extension.</a:t>
             </a:r>
@@ -1884,9 +1884,9 @@
             <a:r>
               <a:rPr lang="en-US" dirty="0"/>
               <a:t>Answers — pupils mark their own in a different colour, then hands up for 3/3, 2/3, 1/3.
-1. A   A critic who has experienced the thing being reviewed. A critic experiences something and then tells readers what it was like and how they formed their opinion.
+1. C   A critic who has experienced the thing being reviewed. A critic experiences something and then tells readers what it was like and how they formed their opinion.
 2. past. The experience has already happened, so the review tells it in the past tense.
-3. B   In the last paragraph. The last paragraph gives a clear judgement specific to the event, with the final reason behind it.
+3. C   In the last paragraph. The last paragraph gives a clear judgement specific to the event, with the final reason behind it.
 Say the route each score points to: 3/3 Stretch, 2/3 Core, 0–1 Support. Pupils may choose to move up.</a:t>
             </a:r>
             <a:endParaRPr lang="en-US" dirty="0"/>
@@ -8660,7 +8660,7 @@
                 <a:ea typeface="Calibri" pitchFamily="34" charset="-122"/>
                 <a:cs typeface="Calibri" pitchFamily="34" charset="-120"/>
               </a:rPr>
-              <a:t>Cutting the facts and keeping only the writer’s opinions, so a crowd could be urged to attend</a:t>
+              <a:t>Describing the kite-making tent in more detail</a:t>
             </a:r>
             <a:endParaRPr lang="en-US" sz="2600" dirty="0"/>
           </a:p>
@@ -8734,7 +8734,7 @@
                 <a:ea typeface="Calibri" pitchFamily="34" charset="-122"/>
                 <a:cs typeface="Calibri" pitchFamily="34" charset="-120"/>
               </a:rPr>
-              <a:t>Describing the kite-making tent in more detail</a:t>
+              <a:t>Including what other visitors thought of the car park</a:t>
             </a:r>
             <a:endParaRPr lang="en-US" sz="2600" dirty="0"/>
           </a:p>
@@ -8771,7 +8771,7 @@
                 <a:ea typeface="Calibri" pitchFamily="34" charset="-122"/>
                 <a:cs typeface="Calibri" pitchFamily="34" charset="-120"/>
               </a:rPr>
-              <a:t>Including what other visitors thought of the car park</a:t>
+              <a:t>Cutting the facts and keeping only the writer’s opinions, so a crowd could be urged to attend</a:t>
             </a:r>
             <a:endParaRPr lang="en-US" sz="2600" dirty="0"/>
           </a:p>
@@ -10138,7 +10138,7 @@
                 <a:ea typeface="Calibri" pitchFamily="34" charset="-122"/>
                 <a:cs typeface="Calibri" pitchFamily="34" charset="-120"/>
               </a:rPr>
-              <a:t>A character inside a story</a:t>
+              <a:t>The person who organised the event</a:t>
             </a:r>
             <a:endParaRPr lang="en-US" sz="2400" dirty="0"/>
           </a:p>
@@ -10175,7 +10175,7 @@
                 <a:ea typeface="Calibri" pitchFamily="34" charset="-122"/>
                 <a:cs typeface="Calibri" pitchFamily="34" charset="-120"/>
               </a:rPr>
-              <a:t>The person who organised the event</a:t>
+              <a:t>A critic who has experienced the thing being reviewed</a:t>
             </a:r>
             <a:endParaRPr lang="en-US" sz="2400" dirty="0"/>
           </a:p>
@@ -10212,7 +10212,7 @@
                 <a:ea typeface="Calibri" pitchFamily="34" charset="-122"/>
                 <a:cs typeface="Calibri" pitchFamily="34" charset="-120"/>
               </a:rPr>
-              <a:t>Anyone, as long as they have never seen it</a:t>
+              <a:t>A character inside a story</a:t>
             </a:r>
             <a:endParaRPr lang="en-US" sz="2400" dirty="0"/>
           </a:p>
@@ -10249,7 +10249,7 @@
                 <a:ea typeface="Calibri" pitchFamily="34" charset="-122"/>
                 <a:cs typeface="Calibri" pitchFamily="34" charset="-120"/>
               </a:rPr>
-              <a:t>A critic who has experienced the thing being reviewed</a:t>
+              <a:t>Anyone, as long as they have never seen it</a:t>
             </a:r>
             <a:endParaRPr lang="en-US" sz="2400" dirty="0"/>
           </a:p>
@@ -11336,7 +11336,7 @@
                 <a:ea typeface="Calibri" pitchFamily="34" charset="-122"/>
                 <a:cs typeface="Calibri" pitchFamily="34" charset="-120"/>
               </a:rPr>
-              <a:t>A critic who has experienced the thing being reviewed</a:t>
+              <a:t>Anyone, as long as they have never seen it</a:t>
             </a:r>
             <a:endParaRPr lang="en-US" sz="2000" dirty="0"/>
           </a:p>
@@ -11373,7 +11373,7 @@
                 <a:ea typeface="Calibri" pitchFamily="34" charset="-122"/>
                 <a:cs typeface="Calibri" pitchFamily="34" charset="-120"/>
               </a:rPr>
-              <a:t>A character inside a story</a:t>
+              <a:t>The person who organised the event</a:t>
             </a:r>
             <a:endParaRPr lang="en-US" sz="2000" dirty="0"/>
           </a:p>
@@ -11410,7 +11410,7 @@
                 <a:ea typeface="Calibri" pitchFamily="34" charset="-122"/>
                 <a:cs typeface="Calibri" pitchFamily="34" charset="-120"/>
               </a:rPr>
-              <a:t>The person who organised the event</a:t>
+              <a:t>A critic who has experienced the thing being reviewed</a:t>
             </a:r>
             <a:endParaRPr lang="en-US" sz="2000" dirty="0"/>
           </a:p>
@@ -11447,7 +11447,7 @@
                 <a:ea typeface="Calibri" pitchFamily="34" charset="-122"/>
                 <a:cs typeface="Calibri" pitchFamily="34" charset="-120"/>
               </a:rPr>
-              <a:t>Anyone, as long as they have never seen it</a:t>
+              <a:t>A character inside a story</a:t>
             </a:r>
             <a:endParaRPr lang="en-US" sz="2000" dirty="0"/>
           </a:p>
@@ -11849,7 +11849,7 @@
                 <a:ea typeface="Calibri" pitchFamily="34" charset="-122"/>
                 <a:cs typeface="Calibri" pitchFamily="34" charset="-120"/>
               </a:rPr>
-              <a:t>Only in the headline</a:t>
+              <a:t>In a list of bullet points at the start</a:t>
             </a:r>
             <a:endParaRPr lang="en-US" sz="2200" dirty="0"/>
           </a:p>
@@ -11886,7 +11886,7 @@
                 <a:ea typeface="Calibri" pitchFamily="34" charset="-122"/>
                 <a:cs typeface="Calibri" pitchFamily="34" charset="-120"/>
               </a:rPr>
-              <a:t>In the last paragraph</a:t>
+              <a:t>Only in the headline</a:t>
             </a:r>
             <a:endParaRPr lang="en-US" sz="2200" dirty="0"/>
           </a:p>
@@ -11923,7 +11923,7 @@
                 <a:ea typeface="Calibri" pitchFamily="34" charset="-122"/>
                 <a:cs typeface="Calibri" pitchFamily="34" charset="-120"/>
               </a:rPr>
-              <a:t>Nowhere; the reader should guess</a:t>
+              <a:t>In the last paragraph</a:t>
             </a:r>
             <a:endParaRPr lang="en-US" sz="2200" dirty="0"/>
           </a:p>
@@ -11960,7 +11960,7 @@
                 <a:ea typeface="Calibri" pitchFamily="34" charset="-122"/>
                 <a:cs typeface="Calibri" pitchFamily="34" charset="-120"/>
               </a:rPr>
-              <a:t>In a list of bullet points at the start</a:t>
+              <a:t>Nowhere; the reader should guess</a:t>
             </a:r>
             <a:endParaRPr lang="en-US" sz="2200" dirty="0"/>
           </a:p>
@@ -12299,7 +12299,7 @@
                 <a:ea typeface="Cambria" pitchFamily="34" charset="-122"/>
                 <a:cs typeface="Cambria" pitchFamily="34" charset="-120"/>
               </a:rPr>
-              <a:t>A   Cutting the facts and keeping only the writer’s opinions, so a crowd could be urged to attend</a:t>
+              <a:t>D   Cutting the facts and keeping only the writer’s opinions, so a crowd could be urged to attend</a:t>
             </a:r>
             <a:endParaRPr lang="en-US" sz="1800" dirty="0"/>
           </a:p>
@@ -12758,7 +12758,7 @@
                 <a:ea typeface="Cambria" pitchFamily="34" charset="-122"/>
                 <a:cs typeface="Cambria" pitchFamily="34" charset="-120"/>
               </a:rPr>
-              <a:t>D   A critic who has experienced the thing being reviewed</a:t>
+              <a:t>B   A critic who has experienced the thing being reviewed</a:t>
             </a:r>
             <a:endParaRPr lang="en-US" sz="1800" dirty="0"/>
           </a:p>
@@ -13279,7 +13279,7 @@
                 <a:ea typeface="Calibri" pitchFamily="34" charset="-122"/>
                 <a:cs typeface="Calibri" pitchFamily="34" charset="-120"/>
               </a:rPr>
-              <a:t>A   A critic who has experienced the thing being reviewed</a:t>
+              <a:t>C   A critic who has experienced the thing being reviewed</a:t>
             </a:r>
             <a:endParaRPr lang="en-US" sz="2200" dirty="0"/>
           </a:p>
@@ -13779,7 +13779,7 @@
                 <a:ea typeface="Calibri" pitchFamily="34" charset="-122"/>
                 <a:cs typeface="Calibri" pitchFamily="34" charset="-120"/>
               </a:rPr>
-              <a:t>B   In the last paragraph</a:t>
+              <a:t>C   In the last paragraph</a:t>
             </a:r>
             <a:endParaRPr lang="en-US" sz="2200" dirty="0"/>
           </a:p>

--- a/decks/englang-opinion/englang-opinion_ch2_review-features.pptx
+++ b/decks/englang-opinion/englang-opinion_ch2_review-features.pptx
@@ -127,29 +127,29 @@
   <p:extLst>
     <p:ext uri="{521415D9-36F7-43E2-AB2F-B90AF26B5E84}">
       <p14:sectionLst xmlns:p14="http://schemas.microsoft.com/office/powerpoint/2010/main">
-        <p14:section name="Opening" id="{175853b3-e993-d8a3-49ac-8c2303208a08}">
+        <p14:section name="Opening" id="{57b9ff99-e102-080c-5063-365954584687}">
           <p14:sldIdLst>
             <p14:sldId id="256"/>
           </p14:sldIdLst>
         </p14:section>
-        <p14:section name="Gate" id="{09c9b760-6313-ab81-2351-fa071d8d759b}">
+        <p14:section name="Gate" id="{3d6ab74c-98d3-bef1-9a6e-43701b7c2dde}">
           <p14:sldIdLst>
             <p14:sldId id="257"/>
             <p14:sldId id="258"/>
           </p14:sldIdLst>
         </p14:section>
-        <p14:section name="Pre-teach" id="{8b70bb8e-a4aa-e981-9ff5-5b9e1c49b9c2}">
+        <p14:section name="Pre-teach" id="{772dacb4-92ab-5dbe-1b7e-e70609e8285d}">
           <p14:sldIdLst>
             <p14:sldId id="259"/>
           </p14:sldIdLst>
         </p14:section>
-        <p14:section name="Read-along" id="{1d65f187-73a9-031f-6ee1-1dc839e2d6dd}">
+        <p14:section name="Read-along" id="{fc8e7ad3-c462-07e0-c8a1-67b1f7e65136}">
           <p14:sldIdLst>
             <p14:sldId id="260"/>
             <p14:sldId id="261"/>
           </p14:sldIdLst>
         </p14:section>
-        <p14:section name="Teach" id="{29185973-ec6b-6ac5-d6e2-17c14d4930c5}">
+        <p14:section name="Teach" id="{6b382e41-1e8e-65d1-046d-c20fcc636761}">
           <p14:sldIdLst>
             <p14:sldId id="262"/>
             <p14:sldId id="263"/>
@@ -158,7 +158,7 @@
             <p14:sldId id="266"/>
           </p14:sldIdLst>
         </p14:section>
-        <p14:section name="Routes" id="{b8928293-1587-84d4-d7df-63cffec311a2}">
+        <p14:section name="Routes" id="{1de61512-4a88-40dd-bf79-e10cb8467a06}">
           <p14:sldIdLst>
             <p14:sldId id="267"/>
             <p14:sldId id="268"/>
@@ -168,12 +168,12 @@
             <p14:sldId id="272"/>
           </p14:sldIdLst>
         </p14:section>
-        <p14:section name="Close" id="{58ea012f-6c24-89ca-3e6e-81eeb373585a}">
+        <p14:section name="Close" id="{eb9d725f-154f-8631-30f0-7a49e3340edd}">
           <p14:sldIdLst>
             <p14:sldId id="273"/>
           </p14:sldIdLst>
         </p14:section>
-        <p14:section name="Answers" id="{2de7e1ff-8a1a-a925-1233-596e6c19cfe5}">
+        <p14:section name="Answers" id="{a35b748e-c5de-e6ba-5045-d4b24bfd8815}">
           <p14:sldIdLst>
             <p14:sldId id="274"/>
             <p14:sldId id="275"/>
